--- a/docs/개발요건/마스카라 적용과정.pptx
+++ b/docs/개발요건/마스카라 적용과정.pptx
@@ -17,6 +17,13 @@
     <p:sldId id="265" r:id="rId11"/>
     <p:sldId id="266" r:id="rId12"/>
     <p:sldId id="267" r:id="rId13"/>
+    <p:sldId id="268" r:id="rId14"/>
+    <p:sldId id="269" r:id="rId15"/>
+    <p:sldId id="270" r:id="rId16"/>
+    <p:sldId id="271" r:id="rId17"/>
+    <p:sldId id="272" r:id="rId18"/>
+    <p:sldId id="273" r:id="rId19"/>
+    <p:sldId id="274" r:id="rId20"/>
   </p:sldIdLst>
   <p:sldSz cx="12192000" cy="6858000"/>
   <p:notesSz cx="6858000" cy="9144000"/>
@@ -145,7 +152,7 @@
           <p:cNvPr id="2" name="제목 1">
             <a:extLst>
               <a:ext uri="{FF2B5EF4-FFF2-40B4-BE49-F238E27FC236}">
-                <a16:creationId xmlns:a16="http://schemas.microsoft.com/office/drawing/2014/main" id="{FCFF1690-B645-09BF-EC99-9CA6F22D7BAC}"/>
+                <a16:creationId xmlns:a16="http://schemas.microsoft.com/office/drawing/2014/main" xmlns="" id="{FCFF1690-B645-09BF-EC99-9CA6F22D7BAC}"/>
               </a:ext>
             </a:extLst>
           </p:cNvPr>
@@ -182,7 +189,7 @@
           <p:cNvPr id="3" name="부제목 2">
             <a:extLst>
               <a:ext uri="{FF2B5EF4-FFF2-40B4-BE49-F238E27FC236}">
-                <a16:creationId xmlns:a16="http://schemas.microsoft.com/office/drawing/2014/main" id="{1F938589-685B-931B-551A-0B7C2F9DD346}"/>
+                <a16:creationId xmlns:a16="http://schemas.microsoft.com/office/drawing/2014/main" xmlns="" id="{1F938589-685B-931B-551A-0B7C2F9DD346}"/>
               </a:ext>
             </a:extLst>
           </p:cNvPr>
@@ -252,7 +259,7 @@
           <p:cNvPr id="4" name="날짜 개체 틀 3">
             <a:extLst>
               <a:ext uri="{FF2B5EF4-FFF2-40B4-BE49-F238E27FC236}">
-                <a16:creationId xmlns:a16="http://schemas.microsoft.com/office/drawing/2014/main" id="{ECB85613-35B8-94DA-5E0B-17A1D165FBD4}"/>
+                <a16:creationId xmlns:a16="http://schemas.microsoft.com/office/drawing/2014/main" xmlns="" id="{ECB85613-35B8-94DA-5E0B-17A1D165FBD4}"/>
               </a:ext>
             </a:extLst>
           </p:cNvPr>
@@ -270,7 +277,7 @@
           <a:p>
             <a:fld id="{D74BF66A-B7C4-48AE-AEF9-0F6143190D7D}" type="datetimeFigureOut">
               <a:rPr lang="ko-KR" altLang="en-US" smtClean="0"/>
-              <a:t>2026-09-20</a:t>
+              <a:t>2026-09-22</a:t>
             </a:fld>
             <a:endParaRPr lang="ko-KR" altLang="en-US"/>
           </a:p>
@@ -281,7 +288,7 @@
           <p:cNvPr id="5" name="바닥글 개체 틀 4">
             <a:extLst>
               <a:ext uri="{FF2B5EF4-FFF2-40B4-BE49-F238E27FC236}">
-                <a16:creationId xmlns:a16="http://schemas.microsoft.com/office/drawing/2014/main" id="{EA090704-DDC1-F863-F659-7643A8B7611B}"/>
+                <a16:creationId xmlns:a16="http://schemas.microsoft.com/office/drawing/2014/main" xmlns="" id="{EA090704-DDC1-F863-F659-7643A8B7611B}"/>
               </a:ext>
             </a:extLst>
           </p:cNvPr>
@@ -306,7 +313,7 @@
           <p:cNvPr id="6" name="슬라이드 번호 개체 틀 5">
             <a:extLst>
               <a:ext uri="{FF2B5EF4-FFF2-40B4-BE49-F238E27FC236}">
-                <a16:creationId xmlns:a16="http://schemas.microsoft.com/office/drawing/2014/main" id="{E14E837A-3CAD-078D-91DB-24193F86050E}"/>
+                <a16:creationId xmlns:a16="http://schemas.microsoft.com/office/drawing/2014/main" xmlns="" id="{E14E837A-3CAD-078D-91DB-24193F86050E}"/>
               </a:ext>
             </a:extLst>
           </p:cNvPr>
@@ -365,7 +372,7 @@
           <p:cNvPr id="2" name="제목 1">
             <a:extLst>
               <a:ext uri="{FF2B5EF4-FFF2-40B4-BE49-F238E27FC236}">
-                <a16:creationId xmlns:a16="http://schemas.microsoft.com/office/drawing/2014/main" id="{7297876B-5273-8919-4B2D-B1747389E9BD}"/>
+                <a16:creationId xmlns:a16="http://schemas.microsoft.com/office/drawing/2014/main" xmlns="" id="{7297876B-5273-8919-4B2D-B1747389E9BD}"/>
               </a:ext>
             </a:extLst>
           </p:cNvPr>
@@ -393,7 +400,7 @@
           <p:cNvPr id="3" name="세로 텍스트 개체 틀 2">
             <a:extLst>
               <a:ext uri="{FF2B5EF4-FFF2-40B4-BE49-F238E27FC236}">
-                <a16:creationId xmlns:a16="http://schemas.microsoft.com/office/drawing/2014/main" id="{36EE4D78-C60B-0ADD-23B4-2CA3FB4321E3}"/>
+                <a16:creationId xmlns:a16="http://schemas.microsoft.com/office/drawing/2014/main" xmlns="" id="{36EE4D78-C60B-0ADD-23B4-2CA3FB4321E3}"/>
               </a:ext>
             </a:extLst>
           </p:cNvPr>
@@ -450,7 +457,7 @@
           <p:cNvPr id="4" name="날짜 개체 틀 3">
             <a:extLst>
               <a:ext uri="{FF2B5EF4-FFF2-40B4-BE49-F238E27FC236}">
-                <a16:creationId xmlns:a16="http://schemas.microsoft.com/office/drawing/2014/main" id="{45B4F0BC-0015-A334-4966-E69CEC97136E}"/>
+                <a16:creationId xmlns:a16="http://schemas.microsoft.com/office/drawing/2014/main" xmlns="" id="{45B4F0BC-0015-A334-4966-E69CEC97136E}"/>
               </a:ext>
             </a:extLst>
           </p:cNvPr>
@@ -468,7 +475,7 @@
           <a:p>
             <a:fld id="{D74BF66A-B7C4-48AE-AEF9-0F6143190D7D}" type="datetimeFigureOut">
               <a:rPr lang="ko-KR" altLang="en-US" smtClean="0"/>
-              <a:t>2026-09-20</a:t>
+              <a:t>2026-09-22</a:t>
             </a:fld>
             <a:endParaRPr lang="ko-KR" altLang="en-US"/>
           </a:p>
@@ -479,7 +486,7 @@
           <p:cNvPr id="5" name="바닥글 개체 틀 4">
             <a:extLst>
               <a:ext uri="{FF2B5EF4-FFF2-40B4-BE49-F238E27FC236}">
-                <a16:creationId xmlns:a16="http://schemas.microsoft.com/office/drawing/2014/main" id="{15130EB9-830D-0ACB-2118-7C30757D50FA}"/>
+                <a16:creationId xmlns:a16="http://schemas.microsoft.com/office/drawing/2014/main" xmlns="" id="{15130EB9-830D-0ACB-2118-7C30757D50FA}"/>
               </a:ext>
             </a:extLst>
           </p:cNvPr>
@@ -504,7 +511,7 @@
           <p:cNvPr id="6" name="슬라이드 번호 개체 틀 5">
             <a:extLst>
               <a:ext uri="{FF2B5EF4-FFF2-40B4-BE49-F238E27FC236}">
-                <a16:creationId xmlns:a16="http://schemas.microsoft.com/office/drawing/2014/main" id="{83718E30-C88C-5BEF-78BA-8C7F7916A049}"/>
+                <a16:creationId xmlns:a16="http://schemas.microsoft.com/office/drawing/2014/main" xmlns="" id="{83718E30-C88C-5BEF-78BA-8C7F7916A049}"/>
               </a:ext>
             </a:extLst>
           </p:cNvPr>
@@ -563,7 +570,7 @@
           <p:cNvPr id="2" name="세로 제목 1">
             <a:extLst>
               <a:ext uri="{FF2B5EF4-FFF2-40B4-BE49-F238E27FC236}">
-                <a16:creationId xmlns:a16="http://schemas.microsoft.com/office/drawing/2014/main" id="{CC704F71-A1D9-413C-A0EC-0A1002A9BA98}"/>
+                <a16:creationId xmlns:a16="http://schemas.microsoft.com/office/drawing/2014/main" xmlns="" id="{CC704F71-A1D9-413C-A0EC-0A1002A9BA98}"/>
               </a:ext>
             </a:extLst>
           </p:cNvPr>
@@ -596,7 +603,7 @@
           <p:cNvPr id="3" name="세로 텍스트 개체 틀 2">
             <a:extLst>
               <a:ext uri="{FF2B5EF4-FFF2-40B4-BE49-F238E27FC236}">
-                <a16:creationId xmlns:a16="http://schemas.microsoft.com/office/drawing/2014/main" id="{DBDFD2CE-1DDC-1B38-6FCB-EDDC61CC9F98}"/>
+                <a16:creationId xmlns:a16="http://schemas.microsoft.com/office/drawing/2014/main" xmlns="" id="{DBDFD2CE-1DDC-1B38-6FCB-EDDC61CC9F98}"/>
               </a:ext>
             </a:extLst>
           </p:cNvPr>
@@ -658,7 +665,7 @@
           <p:cNvPr id="4" name="날짜 개체 틀 3">
             <a:extLst>
               <a:ext uri="{FF2B5EF4-FFF2-40B4-BE49-F238E27FC236}">
-                <a16:creationId xmlns:a16="http://schemas.microsoft.com/office/drawing/2014/main" id="{380BA7A6-65FF-8531-B546-9A9EA55EF389}"/>
+                <a16:creationId xmlns:a16="http://schemas.microsoft.com/office/drawing/2014/main" xmlns="" id="{380BA7A6-65FF-8531-B546-9A9EA55EF389}"/>
               </a:ext>
             </a:extLst>
           </p:cNvPr>
@@ -676,7 +683,7 @@
           <a:p>
             <a:fld id="{D74BF66A-B7C4-48AE-AEF9-0F6143190D7D}" type="datetimeFigureOut">
               <a:rPr lang="ko-KR" altLang="en-US" smtClean="0"/>
-              <a:t>2026-09-20</a:t>
+              <a:t>2026-09-22</a:t>
             </a:fld>
             <a:endParaRPr lang="ko-KR" altLang="en-US"/>
           </a:p>
@@ -687,7 +694,7 @@
           <p:cNvPr id="5" name="바닥글 개체 틀 4">
             <a:extLst>
               <a:ext uri="{FF2B5EF4-FFF2-40B4-BE49-F238E27FC236}">
-                <a16:creationId xmlns:a16="http://schemas.microsoft.com/office/drawing/2014/main" id="{8FECEA0D-3662-D2A7-4A08-65B7E1E37408}"/>
+                <a16:creationId xmlns:a16="http://schemas.microsoft.com/office/drawing/2014/main" xmlns="" id="{8FECEA0D-3662-D2A7-4A08-65B7E1E37408}"/>
               </a:ext>
             </a:extLst>
           </p:cNvPr>
@@ -712,7 +719,7 @@
           <p:cNvPr id="6" name="슬라이드 번호 개체 틀 5">
             <a:extLst>
               <a:ext uri="{FF2B5EF4-FFF2-40B4-BE49-F238E27FC236}">
-                <a16:creationId xmlns:a16="http://schemas.microsoft.com/office/drawing/2014/main" id="{7C456C39-FD91-CEEA-B0C0-5C7464958F7E}"/>
+                <a16:creationId xmlns:a16="http://schemas.microsoft.com/office/drawing/2014/main" xmlns="" id="{7C456C39-FD91-CEEA-B0C0-5C7464958F7E}"/>
               </a:ext>
             </a:extLst>
           </p:cNvPr>
@@ -771,7 +778,7 @@
           <p:cNvPr id="2" name="제목 1">
             <a:extLst>
               <a:ext uri="{FF2B5EF4-FFF2-40B4-BE49-F238E27FC236}">
-                <a16:creationId xmlns:a16="http://schemas.microsoft.com/office/drawing/2014/main" id="{BAE8C81B-2E33-3081-C8F5-98656800CF77}"/>
+                <a16:creationId xmlns:a16="http://schemas.microsoft.com/office/drawing/2014/main" xmlns="" id="{BAE8C81B-2E33-3081-C8F5-98656800CF77}"/>
               </a:ext>
             </a:extLst>
           </p:cNvPr>
@@ -799,7 +806,7 @@
           <p:cNvPr id="3" name="내용 개체 틀 2">
             <a:extLst>
               <a:ext uri="{FF2B5EF4-FFF2-40B4-BE49-F238E27FC236}">
-                <a16:creationId xmlns:a16="http://schemas.microsoft.com/office/drawing/2014/main" id="{92086EFC-9743-8D67-4BA4-024CD89AFB7D}"/>
+                <a16:creationId xmlns:a16="http://schemas.microsoft.com/office/drawing/2014/main" xmlns="" id="{92086EFC-9743-8D67-4BA4-024CD89AFB7D}"/>
               </a:ext>
             </a:extLst>
           </p:cNvPr>
@@ -856,7 +863,7 @@
           <p:cNvPr id="4" name="날짜 개체 틀 3">
             <a:extLst>
               <a:ext uri="{FF2B5EF4-FFF2-40B4-BE49-F238E27FC236}">
-                <a16:creationId xmlns:a16="http://schemas.microsoft.com/office/drawing/2014/main" id="{B66A6EA4-3F5E-E1F3-75BD-AFE3B59D78D7}"/>
+                <a16:creationId xmlns:a16="http://schemas.microsoft.com/office/drawing/2014/main" xmlns="" id="{B66A6EA4-3F5E-E1F3-75BD-AFE3B59D78D7}"/>
               </a:ext>
             </a:extLst>
           </p:cNvPr>
@@ -874,7 +881,7 @@
           <a:p>
             <a:fld id="{D74BF66A-B7C4-48AE-AEF9-0F6143190D7D}" type="datetimeFigureOut">
               <a:rPr lang="ko-KR" altLang="en-US" smtClean="0"/>
-              <a:t>2026-09-20</a:t>
+              <a:t>2026-09-22</a:t>
             </a:fld>
             <a:endParaRPr lang="ko-KR" altLang="en-US"/>
           </a:p>
@@ -885,7 +892,7 @@
           <p:cNvPr id="5" name="바닥글 개체 틀 4">
             <a:extLst>
               <a:ext uri="{FF2B5EF4-FFF2-40B4-BE49-F238E27FC236}">
-                <a16:creationId xmlns:a16="http://schemas.microsoft.com/office/drawing/2014/main" id="{30B6B0C4-5D3B-8B6C-83ED-2148EEE03E3D}"/>
+                <a16:creationId xmlns:a16="http://schemas.microsoft.com/office/drawing/2014/main" xmlns="" id="{30B6B0C4-5D3B-8B6C-83ED-2148EEE03E3D}"/>
               </a:ext>
             </a:extLst>
           </p:cNvPr>
@@ -910,7 +917,7 @@
           <p:cNvPr id="6" name="슬라이드 번호 개체 틀 5">
             <a:extLst>
               <a:ext uri="{FF2B5EF4-FFF2-40B4-BE49-F238E27FC236}">
-                <a16:creationId xmlns:a16="http://schemas.microsoft.com/office/drawing/2014/main" id="{FC2A617B-B788-EEE8-E8ED-661971C70F74}"/>
+                <a16:creationId xmlns:a16="http://schemas.microsoft.com/office/drawing/2014/main" xmlns="" id="{FC2A617B-B788-EEE8-E8ED-661971C70F74}"/>
               </a:ext>
             </a:extLst>
           </p:cNvPr>
@@ -969,7 +976,7 @@
           <p:cNvPr id="2" name="제목 1">
             <a:extLst>
               <a:ext uri="{FF2B5EF4-FFF2-40B4-BE49-F238E27FC236}">
-                <a16:creationId xmlns:a16="http://schemas.microsoft.com/office/drawing/2014/main" id="{6077A597-EADD-290E-16A6-DB70C1990AF8}"/>
+                <a16:creationId xmlns:a16="http://schemas.microsoft.com/office/drawing/2014/main" xmlns="" id="{6077A597-EADD-290E-16A6-DB70C1990AF8}"/>
               </a:ext>
             </a:extLst>
           </p:cNvPr>
@@ -1006,7 +1013,7 @@
           <p:cNvPr id="3" name="텍스트 개체 틀 2">
             <a:extLst>
               <a:ext uri="{FF2B5EF4-FFF2-40B4-BE49-F238E27FC236}">
-                <a16:creationId xmlns:a16="http://schemas.microsoft.com/office/drawing/2014/main" id="{BDDEF93F-6133-27A8-3D16-08372D852137}"/>
+                <a16:creationId xmlns:a16="http://schemas.microsoft.com/office/drawing/2014/main" xmlns="" id="{BDDEF93F-6133-27A8-3D16-08372D852137}"/>
               </a:ext>
             </a:extLst>
           </p:cNvPr>
@@ -1131,7 +1138,7 @@
           <p:cNvPr id="4" name="날짜 개체 틀 3">
             <a:extLst>
               <a:ext uri="{FF2B5EF4-FFF2-40B4-BE49-F238E27FC236}">
-                <a16:creationId xmlns:a16="http://schemas.microsoft.com/office/drawing/2014/main" id="{045FD6F3-FDDE-DBBC-810D-A0BEF0332070}"/>
+                <a16:creationId xmlns:a16="http://schemas.microsoft.com/office/drawing/2014/main" xmlns="" id="{045FD6F3-FDDE-DBBC-810D-A0BEF0332070}"/>
               </a:ext>
             </a:extLst>
           </p:cNvPr>
@@ -1149,7 +1156,7 @@
           <a:p>
             <a:fld id="{D74BF66A-B7C4-48AE-AEF9-0F6143190D7D}" type="datetimeFigureOut">
               <a:rPr lang="ko-KR" altLang="en-US" smtClean="0"/>
-              <a:t>2026-09-20</a:t>
+              <a:t>2026-09-22</a:t>
             </a:fld>
             <a:endParaRPr lang="ko-KR" altLang="en-US"/>
           </a:p>
@@ -1160,7 +1167,7 @@
           <p:cNvPr id="5" name="바닥글 개체 틀 4">
             <a:extLst>
               <a:ext uri="{FF2B5EF4-FFF2-40B4-BE49-F238E27FC236}">
-                <a16:creationId xmlns:a16="http://schemas.microsoft.com/office/drawing/2014/main" id="{F705D5C1-D034-ACB5-ADD1-59FF74117A57}"/>
+                <a16:creationId xmlns:a16="http://schemas.microsoft.com/office/drawing/2014/main" xmlns="" id="{F705D5C1-D034-ACB5-ADD1-59FF74117A57}"/>
               </a:ext>
             </a:extLst>
           </p:cNvPr>
@@ -1185,7 +1192,7 @@
           <p:cNvPr id="6" name="슬라이드 번호 개체 틀 5">
             <a:extLst>
               <a:ext uri="{FF2B5EF4-FFF2-40B4-BE49-F238E27FC236}">
-                <a16:creationId xmlns:a16="http://schemas.microsoft.com/office/drawing/2014/main" id="{4D87DC0E-83E0-606C-A46A-991083E72E60}"/>
+                <a16:creationId xmlns:a16="http://schemas.microsoft.com/office/drawing/2014/main" xmlns="" id="{4D87DC0E-83E0-606C-A46A-991083E72E60}"/>
               </a:ext>
             </a:extLst>
           </p:cNvPr>
@@ -1244,7 +1251,7 @@
           <p:cNvPr id="2" name="제목 1">
             <a:extLst>
               <a:ext uri="{FF2B5EF4-FFF2-40B4-BE49-F238E27FC236}">
-                <a16:creationId xmlns:a16="http://schemas.microsoft.com/office/drawing/2014/main" id="{71ABA6E8-B4CE-0A34-2EFF-8BBBCC5AB6F5}"/>
+                <a16:creationId xmlns:a16="http://schemas.microsoft.com/office/drawing/2014/main" xmlns="" id="{71ABA6E8-B4CE-0A34-2EFF-8BBBCC5AB6F5}"/>
               </a:ext>
             </a:extLst>
           </p:cNvPr>
@@ -1272,7 +1279,7 @@
           <p:cNvPr id="3" name="내용 개체 틀 2">
             <a:extLst>
               <a:ext uri="{FF2B5EF4-FFF2-40B4-BE49-F238E27FC236}">
-                <a16:creationId xmlns:a16="http://schemas.microsoft.com/office/drawing/2014/main" id="{1675EDDD-D5C8-7A6D-4614-06E384A9A5C9}"/>
+                <a16:creationId xmlns:a16="http://schemas.microsoft.com/office/drawing/2014/main" xmlns="" id="{1675EDDD-D5C8-7A6D-4614-06E384A9A5C9}"/>
               </a:ext>
             </a:extLst>
           </p:cNvPr>
@@ -1334,7 +1341,7 @@
           <p:cNvPr id="4" name="내용 개체 틀 3">
             <a:extLst>
               <a:ext uri="{FF2B5EF4-FFF2-40B4-BE49-F238E27FC236}">
-                <a16:creationId xmlns:a16="http://schemas.microsoft.com/office/drawing/2014/main" id="{10C457B0-D549-8A50-93E3-D952A67AF52B}"/>
+                <a16:creationId xmlns:a16="http://schemas.microsoft.com/office/drawing/2014/main" xmlns="" id="{10C457B0-D549-8A50-93E3-D952A67AF52B}"/>
               </a:ext>
             </a:extLst>
           </p:cNvPr>
@@ -1396,7 +1403,7 @@
           <p:cNvPr id="5" name="날짜 개체 틀 4">
             <a:extLst>
               <a:ext uri="{FF2B5EF4-FFF2-40B4-BE49-F238E27FC236}">
-                <a16:creationId xmlns:a16="http://schemas.microsoft.com/office/drawing/2014/main" id="{4163A0B2-EE1A-70CE-7B91-D0A5A9399404}"/>
+                <a16:creationId xmlns:a16="http://schemas.microsoft.com/office/drawing/2014/main" xmlns="" id="{4163A0B2-EE1A-70CE-7B91-D0A5A9399404}"/>
               </a:ext>
             </a:extLst>
           </p:cNvPr>
@@ -1414,7 +1421,7 @@
           <a:p>
             <a:fld id="{D74BF66A-B7C4-48AE-AEF9-0F6143190D7D}" type="datetimeFigureOut">
               <a:rPr lang="ko-KR" altLang="en-US" smtClean="0"/>
-              <a:t>2026-09-20</a:t>
+              <a:t>2026-09-22</a:t>
             </a:fld>
             <a:endParaRPr lang="ko-KR" altLang="en-US"/>
           </a:p>
@@ -1425,7 +1432,7 @@
           <p:cNvPr id="6" name="바닥글 개체 틀 5">
             <a:extLst>
               <a:ext uri="{FF2B5EF4-FFF2-40B4-BE49-F238E27FC236}">
-                <a16:creationId xmlns:a16="http://schemas.microsoft.com/office/drawing/2014/main" id="{438A4C3E-A746-180C-DF04-5B0FCC2ABE1C}"/>
+                <a16:creationId xmlns:a16="http://schemas.microsoft.com/office/drawing/2014/main" xmlns="" id="{438A4C3E-A746-180C-DF04-5B0FCC2ABE1C}"/>
               </a:ext>
             </a:extLst>
           </p:cNvPr>
@@ -1450,7 +1457,7 @@
           <p:cNvPr id="7" name="슬라이드 번호 개체 틀 6">
             <a:extLst>
               <a:ext uri="{FF2B5EF4-FFF2-40B4-BE49-F238E27FC236}">
-                <a16:creationId xmlns:a16="http://schemas.microsoft.com/office/drawing/2014/main" id="{C22421BD-1851-849F-333F-A8D780BCCA9E}"/>
+                <a16:creationId xmlns:a16="http://schemas.microsoft.com/office/drawing/2014/main" xmlns="" id="{C22421BD-1851-849F-333F-A8D780BCCA9E}"/>
               </a:ext>
             </a:extLst>
           </p:cNvPr>
@@ -1509,7 +1516,7 @@
           <p:cNvPr id="2" name="제목 1">
             <a:extLst>
               <a:ext uri="{FF2B5EF4-FFF2-40B4-BE49-F238E27FC236}">
-                <a16:creationId xmlns:a16="http://schemas.microsoft.com/office/drawing/2014/main" id="{20010E39-DB30-A260-7240-AEDC10A63B94}"/>
+                <a16:creationId xmlns:a16="http://schemas.microsoft.com/office/drawing/2014/main" xmlns="" id="{20010E39-DB30-A260-7240-AEDC10A63B94}"/>
               </a:ext>
             </a:extLst>
           </p:cNvPr>
@@ -1542,7 +1549,7 @@
           <p:cNvPr id="3" name="텍스트 개체 틀 2">
             <a:extLst>
               <a:ext uri="{FF2B5EF4-FFF2-40B4-BE49-F238E27FC236}">
-                <a16:creationId xmlns:a16="http://schemas.microsoft.com/office/drawing/2014/main" id="{353DA5D4-79F2-E88C-4B57-EEEFAF4D39A3}"/>
+                <a16:creationId xmlns:a16="http://schemas.microsoft.com/office/drawing/2014/main" xmlns="" id="{353DA5D4-79F2-E88C-4B57-EEEFAF4D39A3}"/>
               </a:ext>
             </a:extLst>
           </p:cNvPr>
@@ -1613,7 +1620,7 @@
           <p:cNvPr id="4" name="내용 개체 틀 3">
             <a:extLst>
               <a:ext uri="{FF2B5EF4-FFF2-40B4-BE49-F238E27FC236}">
-                <a16:creationId xmlns:a16="http://schemas.microsoft.com/office/drawing/2014/main" id="{BF073A9C-16B3-F70D-3AAF-4CE3AD377741}"/>
+                <a16:creationId xmlns:a16="http://schemas.microsoft.com/office/drawing/2014/main" xmlns="" id="{BF073A9C-16B3-F70D-3AAF-4CE3AD377741}"/>
               </a:ext>
             </a:extLst>
           </p:cNvPr>
@@ -1675,7 +1682,7 @@
           <p:cNvPr id="5" name="텍스트 개체 틀 4">
             <a:extLst>
               <a:ext uri="{FF2B5EF4-FFF2-40B4-BE49-F238E27FC236}">
-                <a16:creationId xmlns:a16="http://schemas.microsoft.com/office/drawing/2014/main" id="{DB6B7CAF-855A-969B-D64F-3A932842A82D}"/>
+                <a16:creationId xmlns:a16="http://schemas.microsoft.com/office/drawing/2014/main" xmlns="" id="{DB6B7CAF-855A-969B-D64F-3A932842A82D}"/>
               </a:ext>
             </a:extLst>
           </p:cNvPr>
@@ -1746,7 +1753,7 @@
           <p:cNvPr id="6" name="내용 개체 틀 5">
             <a:extLst>
               <a:ext uri="{FF2B5EF4-FFF2-40B4-BE49-F238E27FC236}">
-                <a16:creationId xmlns:a16="http://schemas.microsoft.com/office/drawing/2014/main" id="{7FC02CDB-FC74-7A91-1AE7-CB05BBBCA7C7}"/>
+                <a16:creationId xmlns:a16="http://schemas.microsoft.com/office/drawing/2014/main" xmlns="" id="{7FC02CDB-FC74-7A91-1AE7-CB05BBBCA7C7}"/>
               </a:ext>
             </a:extLst>
           </p:cNvPr>
@@ -1808,7 +1815,7 @@
           <p:cNvPr id="7" name="날짜 개체 틀 6">
             <a:extLst>
               <a:ext uri="{FF2B5EF4-FFF2-40B4-BE49-F238E27FC236}">
-                <a16:creationId xmlns:a16="http://schemas.microsoft.com/office/drawing/2014/main" id="{6D84226E-9C4C-C0E0-E605-9EC309A1EF96}"/>
+                <a16:creationId xmlns:a16="http://schemas.microsoft.com/office/drawing/2014/main" xmlns="" id="{6D84226E-9C4C-C0E0-E605-9EC309A1EF96}"/>
               </a:ext>
             </a:extLst>
           </p:cNvPr>
@@ -1826,7 +1833,7 @@
           <a:p>
             <a:fld id="{D74BF66A-B7C4-48AE-AEF9-0F6143190D7D}" type="datetimeFigureOut">
               <a:rPr lang="ko-KR" altLang="en-US" smtClean="0"/>
-              <a:t>2026-09-20</a:t>
+              <a:t>2026-09-22</a:t>
             </a:fld>
             <a:endParaRPr lang="ko-KR" altLang="en-US"/>
           </a:p>
@@ -1837,7 +1844,7 @@
           <p:cNvPr id="8" name="바닥글 개체 틀 7">
             <a:extLst>
               <a:ext uri="{FF2B5EF4-FFF2-40B4-BE49-F238E27FC236}">
-                <a16:creationId xmlns:a16="http://schemas.microsoft.com/office/drawing/2014/main" id="{1749C09F-B70F-9BDD-31C1-273AAD1A9066}"/>
+                <a16:creationId xmlns:a16="http://schemas.microsoft.com/office/drawing/2014/main" xmlns="" id="{1749C09F-B70F-9BDD-31C1-273AAD1A9066}"/>
               </a:ext>
             </a:extLst>
           </p:cNvPr>
@@ -1862,7 +1869,7 @@
           <p:cNvPr id="9" name="슬라이드 번호 개체 틀 8">
             <a:extLst>
               <a:ext uri="{FF2B5EF4-FFF2-40B4-BE49-F238E27FC236}">
-                <a16:creationId xmlns:a16="http://schemas.microsoft.com/office/drawing/2014/main" id="{41BAAFE2-799C-6FD3-F056-8CC343C3F63F}"/>
+                <a16:creationId xmlns:a16="http://schemas.microsoft.com/office/drawing/2014/main" xmlns="" id="{41BAAFE2-799C-6FD3-F056-8CC343C3F63F}"/>
               </a:ext>
             </a:extLst>
           </p:cNvPr>
@@ -1921,7 +1928,7 @@
           <p:cNvPr id="2" name="제목 1">
             <a:extLst>
               <a:ext uri="{FF2B5EF4-FFF2-40B4-BE49-F238E27FC236}">
-                <a16:creationId xmlns:a16="http://schemas.microsoft.com/office/drawing/2014/main" id="{B5A52933-C349-B336-C07D-6D6B749F4957}"/>
+                <a16:creationId xmlns:a16="http://schemas.microsoft.com/office/drawing/2014/main" xmlns="" id="{B5A52933-C349-B336-C07D-6D6B749F4957}"/>
               </a:ext>
             </a:extLst>
           </p:cNvPr>
@@ -1949,7 +1956,7 @@
           <p:cNvPr id="3" name="날짜 개체 틀 2">
             <a:extLst>
               <a:ext uri="{FF2B5EF4-FFF2-40B4-BE49-F238E27FC236}">
-                <a16:creationId xmlns:a16="http://schemas.microsoft.com/office/drawing/2014/main" id="{7471FFAD-A971-4FBA-8538-4CDCFECA5E87}"/>
+                <a16:creationId xmlns:a16="http://schemas.microsoft.com/office/drawing/2014/main" xmlns="" id="{7471FFAD-A971-4FBA-8538-4CDCFECA5E87}"/>
               </a:ext>
             </a:extLst>
           </p:cNvPr>
@@ -1967,7 +1974,7 @@
           <a:p>
             <a:fld id="{D74BF66A-B7C4-48AE-AEF9-0F6143190D7D}" type="datetimeFigureOut">
               <a:rPr lang="ko-KR" altLang="en-US" smtClean="0"/>
-              <a:t>2026-09-20</a:t>
+              <a:t>2026-09-22</a:t>
             </a:fld>
             <a:endParaRPr lang="ko-KR" altLang="en-US"/>
           </a:p>
@@ -1978,7 +1985,7 @@
           <p:cNvPr id="4" name="바닥글 개체 틀 3">
             <a:extLst>
               <a:ext uri="{FF2B5EF4-FFF2-40B4-BE49-F238E27FC236}">
-                <a16:creationId xmlns:a16="http://schemas.microsoft.com/office/drawing/2014/main" id="{042E203E-2AFF-1485-D66E-E88FF416CEAA}"/>
+                <a16:creationId xmlns:a16="http://schemas.microsoft.com/office/drawing/2014/main" xmlns="" id="{042E203E-2AFF-1485-D66E-E88FF416CEAA}"/>
               </a:ext>
             </a:extLst>
           </p:cNvPr>
@@ -2003,7 +2010,7 @@
           <p:cNvPr id="5" name="슬라이드 번호 개체 틀 4">
             <a:extLst>
               <a:ext uri="{FF2B5EF4-FFF2-40B4-BE49-F238E27FC236}">
-                <a16:creationId xmlns:a16="http://schemas.microsoft.com/office/drawing/2014/main" id="{C4C589D3-CFE6-EFF4-CDF5-4DD16F920F07}"/>
+                <a16:creationId xmlns:a16="http://schemas.microsoft.com/office/drawing/2014/main" xmlns="" id="{C4C589D3-CFE6-EFF4-CDF5-4DD16F920F07}"/>
               </a:ext>
             </a:extLst>
           </p:cNvPr>
@@ -2062,7 +2069,7 @@
           <p:cNvPr id="2" name="날짜 개체 틀 1">
             <a:extLst>
               <a:ext uri="{FF2B5EF4-FFF2-40B4-BE49-F238E27FC236}">
-                <a16:creationId xmlns:a16="http://schemas.microsoft.com/office/drawing/2014/main" id="{95B926F5-A9BB-662D-1E8B-DF27054E03DF}"/>
+                <a16:creationId xmlns:a16="http://schemas.microsoft.com/office/drawing/2014/main" xmlns="" id="{95B926F5-A9BB-662D-1E8B-DF27054E03DF}"/>
               </a:ext>
             </a:extLst>
           </p:cNvPr>
@@ -2080,7 +2087,7 @@
           <a:p>
             <a:fld id="{D74BF66A-B7C4-48AE-AEF9-0F6143190D7D}" type="datetimeFigureOut">
               <a:rPr lang="ko-KR" altLang="en-US" smtClean="0"/>
-              <a:t>2026-09-20</a:t>
+              <a:t>2026-09-22</a:t>
             </a:fld>
             <a:endParaRPr lang="ko-KR" altLang="en-US"/>
           </a:p>
@@ -2091,7 +2098,7 @@
           <p:cNvPr id="3" name="바닥글 개체 틀 2">
             <a:extLst>
               <a:ext uri="{FF2B5EF4-FFF2-40B4-BE49-F238E27FC236}">
-                <a16:creationId xmlns:a16="http://schemas.microsoft.com/office/drawing/2014/main" id="{8B4591E4-057C-936D-F75F-D93D08756865}"/>
+                <a16:creationId xmlns:a16="http://schemas.microsoft.com/office/drawing/2014/main" xmlns="" id="{8B4591E4-057C-936D-F75F-D93D08756865}"/>
               </a:ext>
             </a:extLst>
           </p:cNvPr>
@@ -2116,7 +2123,7 @@
           <p:cNvPr id="4" name="슬라이드 번호 개체 틀 3">
             <a:extLst>
               <a:ext uri="{FF2B5EF4-FFF2-40B4-BE49-F238E27FC236}">
-                <a16:creationId xmlns:a16="http://schemas.microsoft.com/office/drawing/2014/main" id="{D36FC6AF-BFA4-C46F-5237-32B4C6D7A233}"/>
+                <a16:creationId xmlns:a16="http://schemas.microsoft.com/office/drawing/2014/main" xmlns="" id="{D36FC6AF-BFA4-C46F-5237-32B4C6D7A233}"/>
               </a:ext>
             </a:extLst>
           </p:cNvPr>
@@ -2175,7 +2182,7 @@
           <p:cNvPr id="2" name="제목 1">
             <a:extLst>
               <a:ext uri="{FF2B5EF4-FFF2-40B4-BE49-F238E27FC236}">
-                <a16:creationId xmlns:a16="http://schemas.microsoft.com/office/drawing/2014/main" id="{1F936481-FC2A-067E-B7B3-0EC22DEA26CE}"/>
+                <a16:creationId xmlns:a16="http://schemas.microsoft.com/office/drawing/2014/main" xmlns="" id="{1F936481-FC2A-067E-B7B3-0EC22DEA26CE}"/>
               </a:ext>
             </a:extLst>
           </p:cNvPr>
@@ -2212,7 +2219,7 @@
           <p:cNvPr id="3" name="내용 개체 틀 2">
             <a:extLst>
               <a:ext uri="{FF2B5EF4-FFF2-40B4-BE49-F238E27FC236}">
-                <a16:creationId xmlns:a16="http://schemas.microsoft.com/office/drawing/2014/main" id="{B597A60F-28C9-6EAC-FFE2-BB9DC71B913F}"/>
+                <a16:creationId xmlns:a16="http://schemas.microsoft.com/office/drawing/2014/main" xmlns="" id="{B597A60F-28C9-6EAC-FFE2-BB9DC71B913F}"/>
               </a:ext>
             </a:extLst>
           </p:cNvPr>
@@ -2302,7 +2309,7 @@
           <p:cNvPr id="4" name="텍스트 개체 틀 3">
             <a:extLst>
               <a:ext uri="{FF2B5EF4-FFF2-40B4-BE49-F238E27FC236}">
-                <a16:creationId xmlns:a16="http://schemas.microsoft.com/office/drawing/2014/main" id="{E1A7934C-5FCF-19AD-0C16-071C656F81E6}"/>
+                <a16:creationId xmlns:a16="http://schemas.microsoft.com/office/drawing/2014/main" xmlns="" id="{E1A7934C-5FCF-19AD-0C16-071C656F81E6}"/>
               </a:ext>
             </a:extLst>
           </p:cNvPr>
@@ -2373,7 +2380,7 @@
           <p:cNvPr id="5" name="날짜 개체 틀 4">
             <a:extLst>
               <a:ext uri="{FF2B5EF4-FFF2-40B4-BE49-F238E27FC236}">
-                <a16:creationId xmlns:a16="http://schemas.microsoft.com/office/drawing/2014/main" id="{A0E57023-235E-22AA-DFAF-F0440BCE0A16}"/>
+                <a16:creationId xmlns:a16="http://schemas.microsoft.com/office/drawing/2014/main" xmlns="" id="{A0E57023-235E-22AA-DFAF-F0440BCE0A16}"/>
               </a:ext>
             </a:extLst>
           </p:cNvPr>
@@ -2391,7 +2398,7 @@
           <a:p>
             <a:fld id="{D74BF66A-B7C4-48AE-AEF9-0F6143190D7D}" type="datetimeFigureOut">
               <a:rPr lang="ko-KR" altLang="en-US" smtClean="0"/>
-              <a:t>2026-09-20</a:t>
+              <a:t>2026-09-22</a:t>
             </a:fld>
             <a:endParaRPr lang="ko-KR" altLang="en-US"/>
           </a:p>
@@ -2402,7 +2409,7 @@
           <p:cNvPr id="6" name="바닥글 개체 틀 5">
             <a:extLst>
               <a:ext uri="{FF2B5EF4-FFF2-40B4-BE49-F238E27FC236}">
-                <a16:creationId xmlns:a16="http://schemas.microsoft.com/office/drawing/2014/main" id="{F77B1DA7-1DFD-6C93-943C-5F7B97D4AA30}"/>
+                <a16:creationId xmlns:a16="http://schemas.microsoft.com/office/drawing/2014/main" xmlns="" id="{F77B1DA7-1DFD-6C93-943C-5F7B97D4AA30}"/>
               </a:ext>
             </a:extLst>
           </p:cNvPr>
@@ -2427,7 +2434,7 @@
           <p:cNvPr id="7" name="슬라이드 번호 개체 틀 6">
             <a:extLst>
               <a:ext uri="{FF2B5EF4-FFF2-40B4-BE49-F238E27FC236}">
-                <a16:creationId xmlns:a16="http://schemas.microsoft.com/office/drawing/2014/main" id="{D825D884-6465-7BEC-A15D-F22E4EA64F50}"/>
+                <a16:creationId xmlns:a16="http://schemas.microsoft.com/office/drawing/2014/main" xmlns="" id="{D825D884-6465-7BEC-A15D-F22E4EA64F50}"/>
               </a:ext>
             </a:extLst>
           </p:cNvPr>
@@ -2486,7 +2493,7 @@
           <p:cNvPr id="2" name="제목 1">
             <a:extLst>
               <a:ext uri="{FF2B5EF4-FFF2-40B4-BE49-F238E27FC236}">
-                <a16:creationId xmlns:a16="http://schemas.microsoft.com/office/drawing/2014/main" id="{602B777D-D51F-287E-F07D-43B37F5A88C1}"/>
+                <a16:creationId xmlns:a16="http://schemas.microsoft.com/office/drawing/2014/main" xmlns="" id="{602B777D-D51F-287E-F07D-43B37F5A88C1}"/>
               </a:ext>
             </a:extLst>
           </p:cNvPr>
@@ -2523,7 +2530,7 @@
           <p:cNvPr id="3" name="그림 개체 틀 2">
             <a:extLst>
               <a:ext uri="{FF2B5EF4-FFF2-40B4-BE49-F238E27FC236}">
-                <a16:creationId xmlns:a16="http://schemas.microsoft.com/office/drawing/2014/main" id="{4FB11153-6751-040A-C527-DC827E9419C2}"/>
+                <a16:creationId xmlns:a16="http://schemas.microsoft.com/office/drawing/2014/main" xmlns="" id="{4FB11153-6751-040A-C527-DC827E9419C2}"/>
               </a:ext>
             </a:extLst>
           </p:cNvPr>
@@ -2590,7 +2597,7 @@
           <p:cNvPr id="4" name="텍스트 개체 틀 3">
             <a:extLst>
               <a:ext uri="{FF2B5EF4-FFF2-40B4-BE49-F238E27FC236}">
-                <a16:creationId xmlns:a16="http://schemas.microsoft.com/office/drawing/2014/main" id="{8DA7FE3B-4A03-472D-3D0F-86065B51785B}"/>
+                <a16:creationId xmlns:a16="http://schemas.microsoft.com/office/drawing/2014/main" xmlns="" id="{8DA7FE3B-4A03-472D-3D0F-86065B51785B}"/>
               </a:ext>
             </a:extLst>
           </p:cNvPr>
@@ -2661,7 +2668,7 @@
           <p:cNvPr id="5" name="날짜 개체 틀 4">
             <a:extLst>
               <a:ext uri="{FF2B5EF4-FFF2-40B4-BE49-F238E27FC236}">
-                <a16:creationId xmlns:a16="http://schemas.microsoft.com/office/drawing/2014/main" id="{60362824-6B8D-34DA-1CF6-B6D43AD0E1BF}"/>
+                <a16:creationId xmlns:a16="http://schemas.microsoft.com/office/drawing/2014/main" xmlns="" id="{60362824-6B8D-34DA-1CF6-B6D43AD0E1BF}"/>
               </a:ext>
             </a:extLst>
           </p:cNvPr>
@@ -2679,7 +2686,7 @@
           <a:p>
             <a:fld id="{D74BF66A-B7C4-48AE-AEF9-0F6143190D7D}" type="datetimeFigureOut">
               <a:rPr lang="ko-KR" altLang="en-US" smtClean="0"/>
-              <a:t>2026-09-20</a:t>
+              <a:t>2026-09-22</a:t>
             </a:fld>
             <a:endParaRPr lang="ko-KR" altLang="en-US"/>
           </a:p>
@@ -2690,7 +2697,7 @@
           <p:cNvPr id="6" name="바닥글 개체 틀 5">
             <a:extLst>
               <a:ext uri="{FF2B5EF4-FFF2-40B4-BE49-F238E27FC236}">
-                <a16:creationId xmlns:a16="http://schemas.microsoft.com/office/drawing/2014/main" id="{9AEC1139-09B9-5809-0F9D-6AEDDEE686AF}"/>
+                <a16:creationId xmlns:a16="http://schemas.microsoft.com/office/drawing/2014/main" xmlns="" id="{9AEC1139-09B9-5809-0F9D-6AEDDEE686AF}"/>
               </a:ext>
             </a:extLst>
           </p:cNvPr>
@@ -2715,7 +2722,7 @@
           <p:cNvPr id="7" name="슬라이드 번호 개체 틀 6">
             <a:extLst>
               <a:ext uri="{FF2B5EF4-FFF2-40B4-BE49-F238E27FC236}">
-                <a16:creationId xmlns:a16="http://schemas.microsoft.com/office/drawing/2014/main" id="{64C3CF02-0C8A-4DF0-23D7-4E19251F5AA6}"/>
+                <a16:creationId xmlns:a16="http://schemas.microsoft.com/office/drawing/2014/main" xmlns="" id="{64C3CF02-0C8A-4DF0-23D7-4E19251F5AA6}"/>
               </a:ext>
             </a:extLst>
           </p:cNvPr>
@@ -2779,7 +2786,7 @@
           <p:cNvPr id="2" name="제목 개체 틀 1">
             <a:extLst>
               <a:ext uri="{FF2B5EF4-FFF2-40B4-BE49-F238E27FC236}">
-                <a16:creationId xmlns:a16="http://schemas.microsoft.com/office/drawing/2014/main" id="{A28098D6-C513-5C0F-B5F8-F9F154BB4191}"/>
+                <a16:creationId xmlns:a16="http://schemas.microsoft.com/office/drawing/2014/main" xmlns="" id="{A28098D6-C513-5C0F-B5F8-F9F154BB4191}"/>
               </a:ext>
             </a:extLst>
           </p:cNvPr>
@@ -2817,7 +2824,7 @@
           <p:cNvPr id="3" name="텍스트 개체 틀 2">
             <a:extLst>
               <a:ext uri="{FF2B5EF4-FFF2-40B4-BE49-F238E27FC236}">
-                <a16:creationId xmlns:a16="http://schemas.microsoft.com/office/drawing/2014/main" id="{E0C532E4-752C-4749-483D-51955F88C808}"/>
+                <a16:creationId xmlns:a16="http://schemas.microsoft.com/office/drawing/2014/main" xmlns="" id="{E0C532E4-752C-4749-483D-51955F88C808}"/>
               </a:ext>
             </a:extLst>
           </p:cNvPr>
@@ -2884,7 +2891,7 @@
           <p:cNvPr id="4" name="날짜 개체 틀 3">
             <a:extLst>
               <a:ext uri="{FF2B5EF4-FFF2-40B4-BE49-F238E27FC236}">
-                <a16:creationId xmlns:a16="http://schemas.microsoft.com/office/drawing/2014/main" id="{3B0DF60A-9D4C-72C9-97BE-615BF20582FF}"/>
+                <a16:creationId xmlns:a16="http://schemas.microsoft.com/office/drawing/2014/main" xmlns="" id="{3B0DF60A-9D4C-72C9-97BE-615BF20582FF}"/>
               </a:ext>
             </a:extLst>
           </p:cNvPr>
@@ -2920,7 +2927,7 @@
           <a:p>
             <a:fld id="{D74BF66A-B7C4-48AE-AEF9-0F6143190D7D}" type="datetimeFigureOut">
               <a:rPr lang="ko-KR" altLang="en-US" smtClean="0"/>
-              <a:t>2026-09-20</a:t>
+              <a:t>2026-09-22</a:t>
             </a:fld>
             <a:endParaRPr lang="ko-KR" altLang="en-US"/>
           </a:p>
@@ -2931,7 +2938,7 @@
           <p:cNvPr id="5" name="바닥글 개체 틀 4">
             <a:extLst>
               <a:ext uri="{FF2B5EF4-FFF2-40B4-BE49-F238E27FC236}">
-                <a16:creationId xmlns:a16="http://schemas.microsoft.com/office/drawing/2014/main" id="{52100F6B-2D77-A81F-E7DE-F733468952F1}"/>
+                <a16:creationId xmlns:a16="http://schemas.microsoft.com/office/drawing/2014/main" xmlns="" id="{52100F6B-2D77-A81F-E7DE-F733468952F1}"/>
               </a:ext>
             </a:extLst>
           </p:cNvPr>
@@ -2974,7 +2981,7 @@
           <p:cNvPr id="6" name="슬라이드 번호 개체 틀 5">
             <a:extLst>
               <a:ext uri="{FF2B5EF4-FFF2-40B4-BE49-F238E27FC236}">
-                <a16:creationId xmlns:a16="http://schemas.microsoft.com/office/drawing/2014/main" id="{2BA18EC3-AE47-D4D6-AADE-921D0BECA686}"/>
+                <a16:creationId xmlns:a16="http://schemas.microsoft.com/office/drawing/2014/main" xmlns="" id="{2BA18EC3-AE47-D4D6-AADE-921D0BECA686}"/>
               </a:ext>
             </a:extLst>
           </p:cNvPr>
@@ -3342,7 +3349,7 @@
           <p:cNvPr id="5" name="그림 4">
             <a:extLst>
               <a:ext uri="{FF2B5EF4-FFF2-40B4-BE49-F238E27FC236}">
-                <a16:creationId xmlns:a16="http://schemas.microsoft.com/office/drawing/2014/main" id="{323DBA47-2228-71FA-06BF-09B9A2254A3C}"/>
+                <a16:creationId xmlns:a16="http://schemas.microsoft.com/office/drawing/2014/main" xmlns="" id="{323DBA47-2228-71FA-06BF-09B9A2254A3C}"/>
               </a:ext>
             </a:extLst>
           </p:cNvPr>
@@ -3402,7 +3409,7 @@
           <p:cNvPr id="2" name="제목 1">
             <a:extLst>
               <a:ext uri="{FF2B5EF4-FFF2-40B4-BE49-F238E27FC236}">
-                <a16:creationId xmlns:a16="http://schemas.microsoft.com/office/drawing/2014/main" id="{828C61B6-4688-5CFA-02F3-F3CE8D5BE2A6}"/>
+                <a16:creationId xmlns:a16="http://schemas.microsoft.com/office/drawing/2014/main" xmlns="" id="{828C61B6-4688-5CFA-02F3-F3CE8D5BE2A6}"/>
               </a:ext>
             </a:extLst>
           </p:cNvPr>
@@ -3427,7 +3434,7 @@
           <p:cNvPr id="3" name="내용 개체 틀 2">
             <a:extLst>
               <a:ext uri="{FF2B5EF4-FFF2-40B4-BE49-F238E27FC236}">
-                <a16:creationId xmlns:a16="http://schemas.microsoft.com/office/drawing/2014/main" id="{0B164F67-5769-432A-4B36-102079F9EADC}"/>
+                <a16:creationId xmlns:a16="http://schemas.microsoft.com/office/drawing/2014/main" xmlns="" id="{0B164F67-5769-432A-4B36-102079F9EADC}"/>
               </a:ext>
             </a:extLst>
           </p:cNvPr>
@@ -3482,7 +3489,7 @@
           <p:cNvPr id="2" name="제목 1">
             <a:extLst>
               <a:ext uri="{FF2B5EF4-FFF2-40B4-BE49-F238E27FC236}">
-                <a16:creationId xmlns:a16="http://schemas.microsoft.com/office/drawing/2014/main" id="{7EFB8090-D123-9853-9B41-B46665ED46AA}"/>
+                <a16:creationId xmlns:a16="http://schemas.microsoft.com/office/drawing/2014/main" xmlns="" id="{7EFB8090-D123-9853-9B41-B46665ED46AA}"/>
               </a:ext>
             </a:extLst>
           </p:cNvPr>
@@ -3507,7 +3514,7 @@
           <p:cNvPr id="3" name="내용 개체 틀 2">
             <a:extLst>
               <a:ext uri="{FF2B5EF4-FFF2-40B4-BE49-F238E27FC236}">
-                <a16:creationId xmlns:a16="http://schemas.microsoft.com/office/drawing/2014/main" id="{EB04B3BA-6DA1-0CDC-8E2C-82F0E63A0A97}"/>
+                <a16:creationId xmlns:a16="http://schemas.microsoft.com/office/drawing/2014/main" xmlns="" id="{EB04B3BA-6DA1-0CDC-8E2C-82F0E63A0A97}"/>
               </a:ext>
             </a:extLst>
           </p:cNvPr>
@@ -3527,6 +3534,70 @@
           </a:p>
         </p:txBody>
       </p:sp>
+      <p:sp>
+        <p:nvSpPr>
+          <p:cNvPr id="4" name="직사각형 3"/>
+          <p:cNvSpPr/>
+          <p:nvPr/>
+        </p:nvSpPr>
+        <p:spPr>
+          <a:xfrm>
+            <a:off x="3789407" y="3244334"/>
+            <a:ext cx="4613186" cy="369332"/>
+          </a:xfrm>
+          <a:prstGeom prst="rect">
+            <a:avLst/>
+          </a:prstGeom>
+        </p:spPr>
+        <p:txBody>
+          <a:bodyPr wrap="none">
+            <a:spAutoFit/>
+          </a:bodyPr>
+          <a:lstStyle/>
+          <a:p>
+            <a:r>
+              <a:rPr lang="en-US" altLang="ko-KR" dirty="0" err="1"/>
+              <a:t>UnloadWorker</a:t>
+            </a:r>
+            <a:r>
+              <a:rPr lang="en-US" altLang="ko-KR" dirty="0"/>
+              <a:t>, </a:t>
+            </a:r>
+            <a:r>
+              <a:rPr lang="en-US" altLang="ko-KR" dirty="0" err="1"/>
+              <a:t>UnloadResultVerifyWorker</a:t>
+            </a:r>
+            <a:r>
+              <a:rPr lang="en-US" altLang="ko-KR" dirty="0"/>
+              <a:t>, </a:t>
+            </a:r>
+          </a:p>
+        </p:txBody>
+      </p:sp>
+      <p:pic>
+        <p:nvPicPr>
+          <p:cNvPr id="5" name="그림 4"/>
+          <p:cNvPicPr>
+            <a:picLocks noChangeAspect="1"/>
+          </p:cNvPicPr>
+          <p:nvPr/>
+        </p:nvPicPr>
+        <p:blipFill>
+          <a:blip r:embed="rId2"/>
+          <a:stretch>
+            <a:fillRect/>
+          </a:stretch>
+        </p:blipFill>
+        <p:spPr>
+          <a:xfrm>
+            <a:off x="1114185" y="0"/>
+            <a:ext cx="9963630" cy="6858000"/>
+          </a:xfrm>
+          <a:prstGeom prst="rect">
+            <a:avLst/>
+          </a:prstGeom>
+        </p:spPr>
+      </p:pic>
     </p:spTree>
     <p:extLst>
       <p:ext uri="{BB962C8B-B14F-4D97-AF65-F5344CB8AC3E}">
@@ -3562,7 +3633,7 @@
           <p:cNvPr id="2" name="제목 1">
             <a:extLst>
               <a:ext uri="{FF2B5EF4-FFF2-40B4-BE49-F238E27FC236}">
-                <a16:creationId xmlns:a16="http://schemas.microsoft.com/office/drawing/2014/main" id="{400C1081-1A06-258E-E077-70A2125D8066}"/>
+                <a16:creationId xmlns:a16="http://schemas.microsoft.com/office/drawing/2014/main" xmlns="" id="{400C1081-1A06-258E-E077-70A2125D8066}"/>
               </a:ext>
             </a:extLst>
           </p:cNvPr>
@@ -3587,7 +3658,7 @@
           <p:cNvPr id="3" name="내용 개체 틀 2">
             <a:extLst>
               <a:ext uri="{FF2B5EF4-FFF2-40B4-BE49-F238E27FC236}">
-                <a16:creationId xmlns:a16="http://schemas.microsoft.com/office/drawing/2014/main" id="{B8A454F4-2255-5FFF-6456-4F857C57104A}"/>
+                <a16:creationId xmlns:a16="http://schemas.microsoft.com/office/drawing/2014/main" xmlns="" id="{B8A454F4-2255-5FFF-6456-4F857C57104A}"/>
               </a:ext>
             </a:extLst>
           </p:cNvPr>
@@ -3607,10 +3678,594 @@
           </a:p>
         </p:txBody>
       </p:sp>
+      <p:pic>
+        <p:nvPicPr>
+          <p:cNvPr id="4" name="그림 3"/>
+          <p:cNvPicPr>
+            <a:picLocks noChangeAspect="1"/>
+          </p:cNvPicPr>
+          <p:nvPr/>
+        </p:nvPicPr>
+        <p:blipFill>
+          <a:blip r:embed="rId2"/>
+          <a:stretch>
+            <a:fillRect/>
+          </a:stretch>
+        </p:blipFill>
+        <p:spPr>
+          <a:xfrm>
+            <a:off x="751358" y="0"/>
+            <a:ext cx="10689284" cy="6858000"/>
+          </a:xfrm>
+          <a:prstGeom prst="rect">
+            <a:avLst/>
+          </a:prstGeom>
+        </p:spPr>
+      </p:pic>
     </p:spTree>
     <p:extLst>
       <p:ext uri="{BB962C8B-B14F-4D97-AF65-F5344CB8AC3E}">
         <p14:creationId xmlns:p14="http://schemas.microsoft.com/office/powerpoint/2010/main" val="1123495578"/>
+      </p:ext>
+    </p:extLst>
+  </p:cSld>
+  <p:clrMapOvr>
+    <a:masterClrMapping/>
+  </p:clrMapOvr>
+</p:sld>
+</file>
+
+<file path=ppt/slides/slide13.xml><?xml version="1.0" encoding="utf-8"?>
+<p:sld xmlns:a="http://schemas.openxmlformats.org/drawingml/2006/main" xmlns:r="http://schemas.openxmlformats.org/officeDocument/2006/relationships" xmlns:p="http://schemas.openxmlformats.org/presentationml/2006/main">
+  <p:cSld>
+    <p:spTree>
+      <p:nvGrpSpPr>
+        <p:cNvPr id="1" name=""/>
+        <p:cNvGrpSpPr/>
+        <p:nvPr/>
+      </p:nvGrpSpPr>
+      <p:grpSpPr>
+        <a:xfrm>
+          <a:off x="0" y="0"/>
+          <a:ext cx="0" cy="0"/>
+          <a:chOff x="0" y="0"/>
+          <a:chExt cx="0" cy="0"/>
+        </a:xfrm>
+      </p:grpSpPr>
+      <p:sp>
+        <p:nvSpPr>
+          <p:cNvPr id="2" name="제목 1"/>
+          <p:cNvSpPr>
+            <a:spLocks noGrp="1"/>
+          </p:cNvSpPr>
+          <p:nvPr>
+            <p:ph type="title"/>
+          </p:nvPr>
+        </p:nvSpPr>
+        <p:spPr/>
+        <p:txBody>
+          <a:bodyPr/>
+          <a:lstStyle/>
+          <a:p>
+            <a:endParaRPr lang="ko-KR" altLang="en-US"/>
+          </a:p>
+        </p:txBody>
+      </p:sp>
+      <p:sp>
+        <p:nvSpPr>
+          <p:cNvPr id="3" name="내용 개체 틀 2"/>
+          <p:cNvSpPr>
+            <a:spLocks noGrp="1"/>
+          </p:cNvSpPr>
+          <p:nvPr>
+            <p:ph idx="1"/>
+          </p:nvPr>
+        </p:nvSpPr>
+        <p:spPr/>
+        <p:txBody>
+          <a:bodyPr/>
+          <a:lstStyle/>
+          <a:p>
+            <a:endParaRPr lang="ko-KR" altLang="en-US"/>
+          </a:p>
+        </p:txBody>
+      </p:sp>
+      <p:pic>
+        <p:nvPicPr>
+          <p:cNvPr id="4" name="그림 3"/>
+          <p:cNvPicPr>
+            <a:picLocks noChangeAspect="1"/>
+          </p:cNvPicPr>
+          <p:nvPr/>
+        </p:nvPicPr>
+        <p:blipFill>
+          <a:blip r:embed="rId2"/>
+          <a:stretch>
+            <a:fillRect/>
+          </a:stretch>
+        </p:blipFill>
+        <p:spPr>
+          <a:xfrm>
+            <a:off x="2127895" y="0"/>
+            <a:ext cx="7936209" cy="6858000"/>
+          </a:xfrm>
+          <a:prstGeom prst="rect">
+            <a:avLst/>
+          </a:prstGeom>
+        </p:spPr>
+      </p:pic>
+    </p:spTree>
+    <p:extLst>
+      <p:ext uri="{BB962C8B-B14F-4D97-AF65-F5344CB8AC3E}">
+        <p14:creationId xmlns:p14="http://schemas.microsoft.com/office/powerpoint/2010/main" val="2781120159"/>
+      </p:ext>
+    </p:extLst>
+  </p:cSld>
+  <p:clrMapOvr>
+    <a:masterClrMapping/>
+  </p:clrMapOvr>
+</p:sld>
+</file>
+
+<file path=ppt/slides/slide14.xml><?xml version="1.0" encoding="utf-8"?>
+<p:sld xmlns:a="http://schemas.openxmlformats.org/drawingml/2006/main" xmlns:r="http://schemas.openxmlformats.org/officeDocument/2006/relationships" xmlns:p="http://schemas.openxmlformats.org/presentationml/2006/main">
+  <p:cSld>
+    <p:spTree>
+      <p:nvGrpSpPr>
+        <p:cNvPr id="1" name=""/>
+        <p:cNvGrpSpPr/>
+        <p:nvPr/>
+      </p:nvGrpSpPr>
+      <p:grpSpPr>
+        <a:xfrm>
+          <a:off x="0" y="0"/>
+          <a:ext cx="0" cy="0"/>
+          <a:chOff x="0" y="0"/>
+          <a:chExt cx="0" cy="0"/>
+        </a:xfrm>
+      </p:grpSpPr>
+      <p:sp>
+        <p:nvSpPr>
+          <p:cNvPr id="2" name="제목 1"/>
+          <p:cNvSpPr>
+            <a:spLocks noGrp="1"/>
+          </p:cNvSpPr>
+          <p:nvPr>
+            <p:ph type="title"/>
+          </p:nvPr>
+        </p:nvSpPr>
+        <p:spPr/>
+        <p:txBody>
+          <a:bodyPr/>
+          <a:lstStyle/>
+          <a:p>
+            <a:endParaRPr lang="ko-KR" altLang="en-US"/>
+          </a:p>
+        </p:txBody>
+      </p:sp>
+      <p:sp>
+        <p:nvSpPr>
+          <p:cNvPr id="3" name="내용 개체 틀 2"/>
+          <p:cNvSpPr>
+            <a:spLocks noGrp="1"/>
+          </p:cNvSpPr>
+          <p:nvPr>
+            <p:ph idx="1"/>
+          </p:nvPr>
+        </p:nvSpPr>
+        <p:spPr/>
+        <p:txBody>
+          <a:bodyPr/>
+          <a:lstStyle/>
+          <a:p>
+            <a:endParaRPr lang="ko-KR" altLang="en-US"/>
+          </a:p>
+        </p:txBody>
+      </p:sp>
+      <p:pic>
+        <p:nvPicPr>
+          <p:cNvPr id="4" name="그림 3"/>
+          <p:cNvPicPr>
+            <a:picLocks noChangeAspect="1"/>
+          </p:cNvPicPr>
+          <p:nvPr/>
+        </p:nvPicPr>
+        <p:blipFill>
+          <a:blip r:embed="rId2"/>
+          <a:stretch>
+            <a:fillRect/>
+          </a:stretch>
+        </p:blipFill>
+        <p:spPr>
+          <a:xfrm>
+            <a:off x="2538659" y="0"/>
+            <a:ext cx="7114681" cy="6858000"/>
+          </a:xfrm>
+          <a:prstGeom prst="rect">
+            <a:avLst/>
+          </a:prstGeom>
+        </p:spPr>
+      </p:pic>
+    </p:spTree>
+    <p:extLst>
+      <p:ext uri="{BB962C8B-B14F-4D97-AF65-F5344CB8AC3E}">
+        <p14:creationId xmlns:p14="http://schemas.microsoft.com/office/powerpoint/2010/main" val="1055101745"/>
+      </p:ext>
+    </p:extLst>
+  </p:cSld>
+  <p:clrMapOvr>
+    <a:masterClrMapping/>
+  </p:clrMapOvr>
+</p:sld>
+</file>
+
+<file path=ppt/slides/slide15.xml><?xml version="1.0" encoding="utf-8"?>
+<p:sld xmlns:a="http://schemas.openxmlformats.org/drawingml/2006/main" xmlns:r="http://schemas.openxmlformats.org/officeDocument/2006/relationships" xmlns:p="http://schemas.openxmlformats.org/presentationml/2006/main">
+  <p:cSld>
+    <p:spTree>
+      <p:nvGrpSpPr>
+        <p:cNvPr id="1" name=""/>
+        <p:cNvGrpSpPr/>
+        <p:nvPr/>
+      </p:nvGrpSpPr>
+      <p:grpSpPr>
+        <a:xfrm>
+          <a:off x="0" y="0"/>
+          <a:ext cx="0" cy="0"/>
+          <a:chOff x="0" y="0"/>
+          <a:chExt cx="0" cy="0"/>
+        </a:xfrm>
+      </p:grpSpPr>
+      <p:pic>
+        <p:nvPicPr>
+          <p:cNvPr id="4" name="그림 3"/>
+          <p:cNvPicPr>
+            <a:picLocks noChangeAspect="1"/>
+          </p:cNvPicPr>
+          <p:nvPr/>
+        </p:nvPicPr>
+        <p:blipFill>
+          <a:blip r:embed="rId2"/>
+          <a:stretch>
+            <a:fillRect/>
+          </a:stretch>
+        </p:blipFill>
+        <p:spPr>
+          <a:xfrm>
+            <a:off x="1122835" y="0"/>
+            <a:ext cx="9946329" cy="6858000"/>
+          </a:xfrm>
+          <a:prstGeom prst="rect">
+            <a:avLst/>
+          </a:prstGeom>
+        </p:spPr>
+      </p:pic>
+      <p:sp>
+        <p:nvSpPr>
+          <p:cNvPr id="5" name="TextBox 4"/>
+          <p:cNvSpPr txBox="1"/>
+          <p:nvPr/>
+        </p:nvSpPr>
+        <p:spPr>
+          <a:xfrm>
+            <a:off x="5221224" y="1078992"/>
+            <a:ext cx="7071167" cy="646331"/>
+          </a:xfrm>
+          <a:prstGeom prst="rect">
+            <a:avLst/>
+          </a:prstGeom>
+          <a:solidFill>
+            <a:srgbClr val="FFFF00"/>
+          </a:solidFill>
+        </p:spPr>
+        <p:txBody>
+          <a:bodyPr wrap="none" rtlCol="0">
+            <a:spAutoFit/>
+          </a:bodyPr>
+          <a:lstStyle/>
+          <a:p>
+            <a:r>
+              <a:rPr lang="ko-KR" altLang="en-US" dirty="0" smtClean="0"/>
+              <a:t>검증쿼리를 어떻게 하라는 명시적인 지시가 없어도</a:t>
+            </a:r>
+            <a:r>
+              <a:rPr lang="en-US" altLang="ko-KR" dirty="0" smtClean="0"/>
+              <a:t>,</a:t>
+            </a:r>
+          </a:p>
+          <a:p>
+            <a:r>
+              <a:rPr lang="ko-KR" altLang="en-US" dirty="0" smtClean="0"/>
+              <a:t>테이블의 </a:t>
+            </a:r>
+            <a:r>
+              <a:rPr lang="ko-KR" altLang="en-US" dirty="0" err="1" smtClean="0"/>
+              <a:t>컬럼을</a:t>
+            </a:r>
+            <a:r>
+              <a:rPr lang="ko-KR" altLang="en-US" dirty="0" smtClean="0"/>
+              <a:t> 의미적으로 해석해서 프로그램 및 쿼리를 생성함 </a:t>
+            </a:r>
+            <a:endParaRPr lang="ko-KR" altLang="en-US" dirty="0"/>
+          </a:p>
+        </p:txBody>
+      </p:sp>
+    </p:spTree>
+    <p:extLst>
+      <p:ext uri="{BB962C8B-B14F-4D97-AF65-F5344CB8AC3E}">
+        <p14:creationId xmlns:p14="http://schemas.microsoft.com/office/powerpoint/2010/main" val="2989311020"/>
+      </p:ext>
+    </p:extLst>
+  </p:cSld>
+  <p:clrMapOvr>
+    <a:masterClrMapping/>
+  </p:clrMapOvr>
+</p:sld>
+</file>
+
+<file path=ppt/slides/slide16.xml><?xml version="1.0" encoding="utf-8"?>
+<p:sld xmlns:a="http://schemas.openxmlformats.org/drawingml/2006/main" xmlns:r="http://schemas.openxmlformats.org/officeDocument/2006/relationships" xmlns:p="http://schemas.openxmlformats.org/presentationml/2006/main">
+  <p:cSld>
+    <p:spTree>
+      <p:nvGrpSpPr>
+        <p:cNvPr id="1" name=""/>
+        <p:cNvGrpSpPr/>
+        <p:nvPr/>
+      </p:nvGrpSpPr>
+      <p:grpSpPr>
+        <a:xfrm>
+          <a:off x="0" y="0"/>
+          <a:ext cx="0" cy="0"/>
+          <a:chOff x="0" y="0"/>
+          <a:chExt cx="0" cy="0"/>
+        </a:xfrm>
+      </p:grpSpPr>
+      <p:sp>
+        <p:nvSpPr>
+          <p:cNvPr id="2" name="제목 1"/>
+          <p:cNvSpPr>
+            <a:spLocks noGrp="1"/>
+          </p:cNvSpPr>
+          <p:nvPr>
+            <p:ph type="title"/>
+          </p:nvPr>
+        </p:nvSpPr>
+        <p:spPr/>
+        <p:txBody>
+          <a:bodyPr/>
+          <a:lstStyle/>
+          <a:p>
+            <a:endParaRPr lang="ko-KR" altLang="en-US"/>
+          </a:p>
+        </p:txBody>
+      </p:sp>
+      <p:sp>
+        <p:nvSpPr>
+          <p:cNvPr id="3" name="내용 개체 틀 2"/>
+          <p:cNvSpPr>
+            <a:spLocks noGrp="1"/>
+          </p:cNvSpPr>
+          <p:nvPr>
+            <p:ph idx="1"/>
+          </p:nvPr>
+        </p:nvSpPr>
+        <p:spPr/>
+        <p:txBody>
+          <a:bodyPr/>
+          <a:lstStyle/>
+          <a:p>
+            <a:endParaRPr lang="ko-KR" altLang="en-US"/>
+          </a:p>
+        </p:txBody>
+      </p:sp>
+    </p:spTree>
+    <p:extLst>
+      <p:ext uri="{BB962C8B-B14F-4D97-AF65-F5344CB8AC3E}">
+        <p14:creationId xmlns:p14="http://schemas.microsoft.com/office/powerpoint/2010/main" val="1404929628"/>
+      </p:ext>
+    </p:extLst>
+  </p:cSld>
+  <p:clrMapOvr>
+    <a:masterClrMapping/>
+  </p:clrMapOvr>
+</p:sld>
+</file>
+
+<file path=ppt/slides/slide17.xml><?xml version="1.0" encoding="utf-8"?>
+<p:sld xmlns:a="http://schemas.openxmlformats.org/drawingml/2006/main" xmlns:r="http://schemas.openxmlformats.org/officeDocument/2006/relationships" xmlns:p="http://schemas.openxmlformats.org/presentationml/2006/main">
+  <p:cSld>
+    <p:spTree>
+      <p:nvGrpSpPr>
+        <p:cNvPr id="1" name=""/>
+        <p:cNvGrpSpPr/>
+        <p:nvPr/>
+      </p:nvGrpSpPr>
+      <p:grpSpPr>
+        <a:xfrm>
+          <a:off x="0" y="0"/>
+          <a:ext cx="0" cy="0"/>
+          <a:chOff x="0" y="0"/>
+          <a:chExt cx="0" cy="0"/>
+        </a:xfrm>
+      </p:grpSpPr>
+      <p:sp>
+        <p:nvSpPr>
+          <p:cNvPr id="2" name="제목 1"/>
+          <p:cNvSpPr>
+            <a:spLocks noGrp="1"/>
+          </p:cNvSpPr>
+          <p:nvPr>
+            <p:ph type="title"/>
+          </p:nvPr>
+        </p:nvSpPr>
+        <p:spPr/>
+        <p:txBody>
+          <a:bodyPr/>
+          <a:lstStyle/>
+          <a:p>
+            <a:endParaRPr lang="ko-KR" altLang="en-US"/>
+          </a:p>
+        </p:txBody>
+      </p:sp>
+      <p:sp>
+        <p:nvSpPr>
+          <p:cNvPr id="3" name="내용 개체 틀 2"/>
+          <p:cNvSpPr>
+            <a:spLocks noGrp="1"/>
+          </p:cNvSpPr>
+          <p:nvPr>
+            <p:ph idx="1"/>
+          </p:nvPr>
+        </p:nvSpPr>
+        <p:spPr/>
+        <p:txBody>
+          <a:bodyPr/>
+          <a:lstStyle/>
+          <a:p>
+            <a:endParaRPr lang="ko-KR" altLang="en-US"/>
+          </a:p>
+        </p:txBody>
+      </p:sp>
+    </p:spTree>
+    <p:extLst>
+      <p:ext uri="{BB962C8B-B14F-4D97-AF65-F5344CB8AC3E}">
+        <p14:creationId xmlns:p14="http://schemas.microsoft.com/office/powerpoint/2010/main" val="3087952837"/>
+      </p:ext>
+    </p:extLst>
+  </p:cSld>
+  <p:clrMapOvr>
+    <a:masterClrMapping/>
+  </p:clrMapOvr>
+</p:sld>
+</file>
+
+<file path=ppt/slides/slide18.xml><?xml version="1.0" encoding="utf-8"?>
+<p:sld xmlns:a="http://schemas.openxmlformats.org/drawingml/2006/main" xmlns:r="http://schemas.openxmlformats.org/officeDocument/2006/relationships" xmlns:p="http://schemas.openxmlformats.org/presentationml/2006/main">
+  <p:cSld>
+    <p:spTree>
+      <p:nvGrpSpPr>
+        <p:cNvPr id="1" name=""/>
+        <p:cNvGrpSpPr/>
+        <p:nvPr/>
+      </p:nvGrpSpPr>
+      <p:grpSpPr>
+        <a:xfrm>
+          <a:off x="0" y="0"/>
+          <a:ext cx="0" cy="0"/>
+          <a:chOff x="0" y="0"/>
+          <a:chExt cx="0" cy="0"/>
+        </a:xfrm>
+      </p:grpSpPr>
+      <p:sp>
+        <p:nvSpPr>
+          <p:cNvPr id="2" name="제목 1"/>
+          <p:cNvSpPr>
+            <a:spLocks noGrp="1"/>
+          </p:cNvSpPr>
+          <p:nvPr>
+            <p:ph type="title"/>
+          </p:nvPr>
+        </p:nvSpPr>
+        <p:spPr/>
+        <p:txBody>
+          <a:bodyPr/>
+          <a:lstStyle/>
+          <a:p>
+            <a:endParaRPr lang="ko-KR" altLang="en-US"/>
+          </a:p>
+        </p:txBody>
+      </p:sp>
+      <p:sp>
+        <p:nvSpPr>
+          <p:cNvPr id="3" name="내용 개체 틀 2"/>
+          <p:cNvSpPr>
+            <a:spLocks noGrp="1"/>
+          </p:cNvSpPr>
+          <p:nvPr>
+            <p:ph idx="1"/>
+          </p:nvPr>
+        </p:nvSpPr>
+        <p:spPr/>
+        <p:txBody>
+          <a:bodyPr/>
+          <a:lstStyle/>
+          <a:p>
+            <a:endParaRPr lang="ko-KR" altLang="en-US"/>
+          </a:p>
+        </p:txBody>
+      </p:sp>
+    </p:spTree>
+    <p:extLst>
+      <p:ext uri="{BB962C8B-B14F-4D97-AF65-F5344CB8AC3E}">
+        <p14:creationId xmlns:p14="http://schemas.microsoft.com/office/powerpoint/2010/main" val="3943446229"/>
+      </p:ext>
+    </p:extLst>
+  </p:cSld>
+  <p:clrMapOvr>
+    <a:masterClrMapping/>
+  </p:clrMapOvr>
+</p:sld>
+</file>
+
+<file path=ppt/slides/slide19.xml><?xml version="1.0" encoding="utf-8"?>
+<p:sld xmlns:a="http://schemas.openxmlformats.org/drawingml/2006/main" xmlns:r="http://schemas.openxmlformats.org/officeDocument/2006/relationships" xmlns:p="http://schemas.openxmlformats.org/presentationml/2006/main">
+  <p:cSld>
+    <p:spTree>
+      <p:nvGrpSpPr>
+        <p:cNvPr id="1" name=""/>
+        <p:cNvGrpSpPr/>
+        <p:nvPr/>
+      </p:nvGrpSpPr>
+      <p:grpSpPr>
+        <a:xfrm>
+          <a:off x="0" y="0"/>
+          <a:ext cx="0" cy="0"/>
+          <a:chOff x="0" y="0"/>
+          <a:chExt cx="0" cy="0"/>
+        </a:xfrm>
+      </p:grpSpPr>
+      <p:sp>
+        <p:nvSpPr>
+          <p:cNvPr id="2" name="제목 1"/>
+          <p:cNvSpPr>
+            <a:spLocks noGrp="1"/>
+          </p:cNvSpPr>
+          <p:nvPr>
+            <p:ph type="title"/>
+          </p:nvPr>
+        </p:nvSpPr>
+        <p:spPr/>
+        <p:txBody>
+          <a:bodyPr/>
+          <a:lstStyle/>
+          <a:p>
+            <a:endParaRPr lang="ko-KR" altLang="en-US"/>
+          </a:p>
+        </p:txBody>
+      </p:sp>
+      <p:sp>
+        <p:nvSpPr>
+          <p:cNvPr id="3" name="내용 개체 틀 2"/>
+          <p:cNvSpPr>
+            <a:spLocks noGrp="1"/>
+          </p:cNvSpPr>
+          <p:nvPr>
+            <p:ph idx="1"/>
+          </p:nvPr>
+        </p:nvSpPr>
+        <p:spPr/>
+        <p:txBody>
+          <a:bodyPr/>
+          <a:lstStyle/>
+          <a:p>
+            <a:endParaRPr lang="ko-KR" altLang="en-US"/>
+          </a:p>
+        </p:txBody>
+      </p:sp>
+    </p:spTree>
+    <p:extLst>
+      <p:ext uri="{BB962C8B-B14F-4D97-AF65-F5344CB8AC3E}">
+        <p14:creationId xmlns:p14="http://schemas.microsoft.com/office/powerpoint/2010/main" val="1462755060"/>
       </p:ext>
     </p:extLst>
   </p:cSld>
@@ -3642,7 +4297,7 @@
           <p:cNvPr id="2" name="제목 1">
             <a:extLst>
               <a:ext uri="{FF2B5EF4-FFF2-40B4-BE49-F238E27FC236}">
-                <a16:creationId xmlns:a16="http://schemas.microsoft.com/office/drawing/2014/main" id="{1F7D4BF2-E175-C25D-8915-8C41FA5EC2D6}"/>
+                <a16:creationId xmlns:a16="http://schemas.microsoft.com/office/drawing/2014/main" xmlns="" id="{1F7D4BF2-E175-C25D-8915-8C41FA5EC2D6}"/>
               </a:ext>
             </a:extLst>
           </p:cNvPr>
@@ -3667,7 +4322,7 @@
           <p:cNvPr id="3" name="내용 개체 틀 2">
             <a:extLst>
               <a:ext uri="{FF2B5EF4-FFF2-40B4-BE49-F238E27FC236}">
-                <a16:creationId xmlns:a16="http://schemas.microsoft.com/office/drawing/2014/main" id="{70BC9832-FAE3-82B4-3E6F-1E780F1FBFA1}"/>
+                <a16:creationId xmlns:a16="http://schemas.microsoft.com/office/drawing/2014/main" xmlns="" id="{70BC9832-FAE3-82B4-3E6F-1E780F1FBFA1}"/>
               </a:ext>
             </a:extLst>
           </p:cNvPr>
@@ -3722,7 +4377,7 @@
           <p:cNvPr id="2" name="제목 1">
             <a:extLst>
               <a:ext uri="{FF2B5EF4-FFF2-40B4-BE49-F238E27FC236}">
-                <a16:creationId xmlns:a16="http://schemas.microsoft.com/office/drawing/2014/main" id="{A54E7FE6-D910-D76C-AD7E-3269AE261E26}"/>
+                <a16:creationId xmlns:a16="http://schemas.microsoft.com/office/drawing/2014/main" xmlns="" id="{A54E7FE6-D910-D76C-AD7E-3269AE261E26}"/>
               </a:ext>
             </a:extLst>
           </p:cNvPr>
@@ -3747,7 +4402,7 @@
           <p:cNvPr id="3" name="내용 개체 틀 2">
             <a:extLst>
               <a:ext uri="{FF2B5EF4-FFF2-40B4-BE49-F238E27FC236}">
-                <a16:creationId xmlns:a16="http://schemas.microsoft.com/office/drawing/2014/main" id="{5D31FBC9-2015-26EC-2F73-752302E74C23}"/>
+                <a16:creationId xmlns:a16="http://schemas.microsoft.com/office/drawing/2014/main" xmlns="" id="{5D31FBC9-2015-26EC-2F73-752302E74C23}"/>
               </a:ext>
             </a:extLst>
           </p:cNvPr>
@@ -3802,7 +4457,7 @@
           <p:cNvPr id="2" name="제목 1">
             <a:extLst>
               <a:ext uri="{FF2B5EF4-FFF2-40B4-BE49-F238E27FC236}">
-                <a16:creationId xmlns:a16="http://schemas.microsoft.com/office/drawing/2014/main" id="{BD90CB76-48EC-3B06-3823-CEFD767C4A0E}"/>
+                <a16:creationId xmlns:a16="http://schemas.microsoft.com/office/drawing/2014/main" xmlns="" id="{BD90CB76-48EC-3B06-3823-CEFD767C4A0E}"/>
               </a:ext>
             </a:extLst>
           </p:cNvPr>
@@ -3827,7 +4482,7 @@
           <p:cNvPr id="3" name="내용 개체 틀 2">
             <a:extLst>
               <a:ext uri="{FF2B5EF4-FFF2-40B4-BE49-F238E27FC236}">
-                <a16:creationId xmlns:a16="http://schemas.microsoft.com/office/drawing/2014/main" id="{EB96C1B1-21C7-5B56-FBD1-CFCE16D88206}"/>
+                <a16:creationId xmlns:a16="http://schemas.microsoft.com/office/drawing/2014/main" xmlns="" id="{EB96C1B1-21C7-5B56-FBD1-CFCE16D88206}"/>
               </a:ext>
             </a:extLst>
           </p:cNvPr>
@@ -3852,7 +4507,7 @@
           <p:cNvPr id="5" name="그림 4">
             <a:extLst>
               <a:ext uri="{FF2B5EF4-FFF2-40B4-BE49-F238E27FC236}">
-                <a16:creationId xmlns:a16="http://schemas.microsoft.com/office/drawing/2014/main" id="{03386E8A-9BB2-63A1-F7D1-D39D3B1D12FF}"/>
+                <a16:creationId xmlns:a16="http://schemas.microsoft.com/office/drawing/2014/main" xmlns="" id="{03386E8A-9BB2-63A1-F7D1-D39D3B1D12FF}"/>
               </a:ext>
             </a:extLst>
           </p:cNvPr>
@@ -3912,7 +4567,7 @@
           <p:cNvPr id="2" name="제목 1">
             <a:extLst>
               <a:ext uri="{FF2B5EF4-FFF2-40B4-BE49-F238E27FC236}">
-                <a16:creationId xmlns:a16="http://schemas.microsoft.com/office/drawing/2014/main" id="{32CC91DE-CAB5-7B8C-531F-D5051716F582}"/>
+                <a16:creationId xmlns:a16="http://schemas.microsoft.com/office/drawing/2014/main" xmlns="" id="{32CC91DE-CAB5-7B8C-531F-D5051716F582}"/>
               </a:ext>
             </a:extLst>
           </p:cNvPr>
@@ -3937,7 +4592,7 @@
           <p:cNvPr id="3" name="내용 개체 틀 2">
             <a:extLst>
               <a:ext uri="{FF2B5EF4-FFF2-40B4-BE49-F238E27FC236}">
-                <a16:creationId xmlns:a16="http://schemas.microsoft.com/office/drawing/2014/main" id="{CFAF694B-D2A1-F974-1C5F-D1100197D59D}"/>
+                <a16:creationId xmlns:a16="http://schemas.microsoft.com/office/drawing/2014/main" xmlns="" id="{CFAF694B-D2A1-F974-1C5F-D1100197D59D}"/>
               </a:ext>
             </a:extLst>
           </p:cNvPr>
@@ -3962,7 +4617,7 @@
           <p:cNvPr id="5" name="그림 4">
             <a:extLst>
               <a:ext uri="{FF2B5EF4-FFF2-40B4-BE49-F238E27FC236}">
-                <a16:creationId xmlns:a16="http://schemas.microsoft.com/office/drawing/2014/main" id="{3095A4F5-86A2-D354-BA33-F735D0CAC39F}"/>
+                <a16:creationId xmlns:a16="http://schemas.microsoft.com/office/drawing/2014/main" xmlns="" id="{3095A4F5-86A2-D354-BA33-F735D0CAC39F}"/>
               </a:ext>
             </a:extLst>
           </p:cNvPr>
@@ -4022,7 +4677,7 @@
           <p:cNvPr id="2" name="제목 1">
             <a:extLst>
               <a:ext uri="{FF2B5EF4-FFF2-40B4-BE49-F238E27FC236}">
-                <a16:creationId xmlns:a16="http://schemas.microsoft.com/office/drawing/2014/main" id="{399591F1-E6F8-FC89-B909-2B91FD39A931}"/>
+                <a16:creationId xmlns:a16="http://schemas.microsoft.com/office/drawing/2014/main" xmlns="" id="{399591F1-E6F8-FC89-B909-2B91FD39A931}"/>
               </a:ext>
             </a:extLst>
           </p:cNvPr>
@@ -4047,7 +4702,7 @@
           <p:cNvPr id="3" name="내용 개체 틀 2">
             <a:extLst>
               <a:ext uri="{FF2B5EF4-FFF2-40B4-BE49-F238E27FC236}">
-                <a16:creationId xmlns:a16="http://schemas.microsoft.com/office/drawing/2014/main" id="{93C2F66F-592D-62CE-9FC0-E449B2FE1E67}"/>
+                <a16:creationId xmlns:a16="http://schemas.microsoft.com/office/drawing/2014/main" xmlns="" id="{93C2F66F-592D-62CE-9FC0-E449B2FE1E67}"/>
               </a:ext>
             </a:extLst>
           </p:cNvPr>
@@ -4072,7 +4727,7 @@
           <p:cNvPr id="5" name="그림 4">
             <a:extLst>
               <a:ext uri="{FF2B5EF4-FFF2-40B4-BE49-F238E27FC236}">
-                <a16:creationId xmlns:a16="http://schemas.microsoft.com/office/drawing/2014/main" id="{9CBC6502-3C0B-F816-7697-671BC501BA36}"/>
+                <a16:creationId xmlns:a16="http://schemas.microsoft.com/office/drawing/2014/main" xmlns="" id="{9CBC6502-3C0B-F816-7697-671BC501BA36}"/>
               </a:ext>
             </a:extLst>
           </p:cNvPr>
@@ -4132,7 +4787,7 @@
           <p:cNvPr id="2" name="제목 1">
             <a:extLst>
               <a:ext uri="{FF2B5EF4-FFF2-40B4-BE49-F238E27FC236}">
-                <a16:creationId xmlns:a16="http://schemas.microsoft.com/office/drawing/2014/main" id="{1EB4EEBB-6809-5DB4-6BD6-ABDA08EB1979}"/>
+                <a16:creationId xmlns:a16="http://schemas.microsoft.com/office/drawing/2014/main" xmlns="" id="{1EB4EEBB-6809-5DB4-6BD6-ABDA08EB1979}"/>
               </a:ext>
             </a:extLst>
           </p:cNvPr>
@@ -4157,7 +4812,7 @@
           <p:cNvPr id="3" name="내용 개체 틀 2">
             <a:extLst>
               <a:ext uri="{FF2B5EF4-FFF2-40B4-BE49-F238E27FC236}">
-                <a16:creationId xmlns:a16="http://schemas.microsoft.com/office/drawing/2014/main" id="{C157B5E8-7940-7048-41EB-63BACE1AB57A}"/>
+                <a16:creationId xmlns:a16="http://schemas.microsoft.com/office/drawing/2014/main" xmlns="" id="{C157B5E8-7940-7048-41EB-63BACE1AB57A}"/>
               </a:ext>
             </a:extLst>
           </p:cNvPr>
@@ -4182,7 +4837,7 @@
           <p:cNvPr id="5" name="그림 4">
             <a:extLst>
               <a:ext uri="{FF2B5EF4-FFF2-40B4-BE49-F238E27FC236}">
-                <a16:creationId xmlns:a16="http://schemas.microsoft.com/office/drawing/2014/main" id="{ED2049F6-D9E3-733B-119F-80BD942D9262}"/>
+                <a16:creationId xmlns:a16="http://schemas.microsoft.com/office/drawing/2014/main" xmlns="" id="{ED2049F6-D9E3-733B-119F-80BD942D9262}"/>
               </a:ext>
             </a:extLst>
           </p:cNvPr>
@@ -4242,7 +4897,7 @@
           <p:cNvPr id="2" name="제목 1">
             <a:extLst>
               <a:ext uri="{FF2B5EF4-FFF2-40B4-BE49-F238E27FC236}">
-                <a16:creationId xmlns:a16="http://schemas.microsoft.com/office/drawing/2014/main" id="{28949CF3-E156-42A1-1DB8-34C3189264A9}"/>
+                <a16:creationId xmlns:a16="http://schemas.microsoft.com/office/drawing/2014/main" xmlns="" id="{28949CF3-E156-42A1-1DB8-34C3189264A9}"/>
               </a:ext>
             </a:extLst>
           </p:cNvPr>
@@ -4267,7 +4922,7 @@
           <p:cNvPr id="3" name="내용 개체 틀 2">
             <a:extLst>
               <a:ext uri="{FF2B5EF4-FFF2-40B4-BE49-F238E27FC236}">
-                <a16:creationId xmlns:a16="http://schemas.microsoft.com/office/drawing/2014/main" id="{70A5C943-B40B-59B0-7C73-CA64B225614B}"/>
+                <a16:creationId xmlns:a16="http://schemas.microsoft.com/office/drawing/2014/main" xmlns="" id="{70A5C943-B40B-59B0-7C73-CA64B225614B}"/>
               </a:ext>
             </a:extLst>
           </p:cNvPr>
@@ -4292,7 +4947,7 @@
           <p:cNvPr id="5" name="그림 4">
             <a:extLst>
               <a:ext uri="{FF2B5EF4-FFF2-40B4-BE49-F238E27FC236}">
-                <a16:creationId xmlns:a16="http://schemas.microsoft.com/office/drawing/2014/main" id="{2AEE1A53-8AB9-0AF0-4D72-218082FAF20F}"/>
+                <a16:creationId xmlns:a16="http://schemas.microsoft.com/office/drawing/2014/main" xmlns="" id="{2AEE1A53-8AB9-0AF0-4D72-218082FAF20F}"/>
               </a:ext>
             </a:extLst>
           </p:cNvPr>
@@ -4352,7 +5007,7 @@
           <p:cNvPr id="2" name="제목 1">
             <a:extLst>
               <a:ext uri="{FF2B5EF4-FFF2-40B4-BE49-F238E27FC236}">
-                <a16:creationId xmlns:a16="http://schemas.microsoft.com/office/drawing/2014/main" id="{4C8962AC-EF3B-A9B4-0F87-E3731C13304D}"/>
+                <a16:creationId xmlns:a16="http://schemas.microsoft.com/office/drawing/2014/main" xmlns="" id="{4C8962AC-EF3B-A9B4-0F87-E3731C13304D}"/>
               </a:ext>
             </a:extLst>
           </p:cNvPr>
@@ -4377,7 +5032,7 @@
           <p:cNvPr id="3" name="내용 개체 틀 2">
             <a:extLst>
               <a:ext uri="{FF2B5EF4-FFF2-40B4-BE49-F238E27FC236}">
-                <a16:creationId xmlns:a16="http://schemas.microsoft.com/office/drawing/2014/main" id="{579EDDAD-A7FE-6D7C-A222-108D842C60AB}"/>
+                <a16:creationId xmlns:a16="http://schemas.microsoft.com/office/drawing/2014/main" xmlns="" id="{579EDDAD-A7FE-6D7C-A222-108D842C60AB}"/>
               </a:ext>
             </a:extLst>
           </p:cNvPr>
@@ -4402,7 +5057,7 @@
           <p:cNvPr id="5" name="그림 4">
             <a:extLst>
               <a:ext uri="{FF2B5EF4-FFF2-40B4-BE49-F238E27FC236}">
-                <a16:creationId xmlns:a16="http://schemas.microsoft.com/office/drawing/2014/main" id="{C6523145-3A5D-8F82-D39B-5BF133F83856}"/>
+                <a16:creationId xmlns:a16="http://schemas.microsoft.com/office/drawing/2014/main" xmlns="" id="{C6523145-3A5D-8F82-D39B-5BF133F83856}"/>
               </a:ext>
             </a:extLst>
           </p:cNvPr>
@@ -4432,7 +5087,7 @@
           <p:cNvPr id="7" name="그림 6">
             <a:extLst>
               <a:ext uri="{FF2B5EF4-FFF2-40B4-BE49-F238E27FC236}">
-                <a16:creationId xmlns:a16="http://schemas.microsoft.com/office/drawing/2014/main" id="{D7B2C0DC-04ED-B422-9696-E15909D46983}"/>
+                <a16:creationId xmlns:a16="http://schemas.microsoft.com/office/drawing/2014/main" xmlns="" id="{D7B2C0DC-04ED-B422-9696-E15909D46983}"/>
               </a:ext>
             </a:extLst>
           </p:cNvPr>
